--- a/docs/pitch/TheAgentOrg-final.pptx
+++ b/docs/pitch/TheAgentOrg-final.pptx
@@ -4411,7 +4411,7 @@
                 </a:solidFill>
                 <a:latin typeface="Helvetica Neue"/>
               </a:rPr>
-              <a:t>1860</a:t>
+              <a:t>2143</a:t>
             </a:r>
           </a:p>
         </p:txBody>
@@ -4466,7 +4466,7 @@
                 </a:solidFill>
                 <a:latin typeface="Helvetica Neue"/>
               </a:rPr>
-              <a:t>across 73 files</a:t>
+              <a:t>across 90 files</a:t>
             </a:r>
           </a:p>
         </p:txBody>
@@ -5637,7 +5637,7 @@
                 </a:solidFill>
                 <a:latin typeface="Helvetica Neue"/>
               </a:rPr>
-              <a:t>A web app: watch a run live, approve or refuse.</a:t>
+              <a:t>A hosted web app: sign in, watch a run live, approve or refuse.</a:t>
             </a:r>
           </a:p>
         </p:txBody>
@@ -5676,7 +5676,7 @@
                 </a:solidFill>
                 <a:latin typeface="Helvetica Neue"/>
               </a:rPr>
-              <a:t>20,475 lines of pipeline and 8,769 of application, under 1860 tests and 166 more for the web.</a:t>
+              <a:t>22,694 lines of pipeline and 10,669 of application, under 2143 tests and 204 more for the web.</a:t>
             </a:r>
           </a:p>
         </p:txBody>
@@ -19038,7 +19038,7 @@
                 </a:solidFill>
                 <a:latin typeface="Helvetica Neue"/>
               </a:rPr>
-              <a:t>20 infrastructure resources, all defined as code   ·   no long-lived cloud credentials anywhere</a:t>
+              <a:t>36 infrastructure resources, all defined as code   ·   no long-lived cloud credentials anywhere</a:t>
             </a:r>
           </a:p>
         </p:txBody>
